--- a/Защита курсовой_ Разработка на Java LibGDX.pptx
+++ b/Защита курсовой_ Разработка на Java LibGDX.pptx
@@ -14862,7 +14862,7 @@
         </p:blipFill>
         <p:spPr>
           <a:xfrm>
-            <a:off x="4692699" y="2244179"/>
+            <a:off x="4692625" y="2317477"/>
             <a:ext cx="428625" cy="381000"/>
           </a:xfrm>
           <a:prstGeom prst="rect">
